--- a/ゲーム科1年/00_前期/ゲームプログラミングⅢ/ゲーム数学/実習/11_接線ベクトルと反射ベクトル.pptx
+++ b/ゲーム科1年/00_前期/ゲームプログラミングⅢ/ゲーム数学/実習/11_接線ベクトルと反射ベクトル.pptx
@@ -268,7 +268,7 @@
           <a:p>
             <a:fld id="{E9CC885B-4903-4D54-9A93-00025F12DED9}" type="datetimeFigureOut">
               <a:rPr kumimoji="1" lang="ja-JP" altLang="en-US" smtClean="0"/>
-              <a:t>2024/11/7</a:t>
+              <a:t>2025/1/6</a:t>
             </a:fld>
             <a:endParaRPr kumimoji="1" lang="ja-JP" altLang="en-US"/>
           </a:p>
@@ -498,7 +498,7 @@
           <a:p>
             <a:fld id="{E9CC885B-4903-4D54-9A93-00025F12DED9}" type="datetimeFigureOut">
               <a:rPr kumimoji="1" lang="ja-JP" altLang="en-US" smtClean="0"/>
-              <a:t>2024/11/7</a:t>
+              <a:t>2025/1/6</a:t>
             </a:fld>
             <a:endParaRPr kumimoji="1" lang="ja-JP" altLang="en-US"/>
           </a:p>
@@ -738,7 +738,7 @@
           <a:p>
             <a:fld id="{E9CC885B-4903-4D54-9A93-00025F12DED9}" type="datetimeFigureOut">
               <a:rPr kumimoji="1" lang="ja-JP" altLang="en-US" smtClean="0"/>
-              <a:t>2024/11/7</a:t>
+              <a:t>2025/1/6</a:t>
             </a:fld>
             <a:endParaRPr kumimoji="1" lang="ja-JP" altLang="en-US"/>
           </a:p>
@@ -968,7 +968,7 @@
           <a:p>
             <a:fld id="{E9CC885B-4903-4D54-9A93-00025F12DED9}" type="datetimeFigureOut">
               <a:rPr kumimoji="1" lang="ja-JP" altLang="en-US" smtClean="0"/>
-              <a:t>2024/11/7</a:t>
+              <a:t>2025/1/6</a:t>
             </a:fld>
             <a:endParaRPr kumimoji="1" lang="ja-JP" altLang="en-US"/>
           </a:p>
@@ -1243,7 +1243,7 @@
           <a:p>
             <a:fld id="{E9CC885B-4903-4D54-9A93-00025F12DED9}" type="datetimeFigureOut">
               <a:rPr kumimoji="1" lang="ja-JP" altLang="en-US" smtClean="0"/>
-              <a:t>2024/11/7</a:t>
+              <a:t>2025/1/6</a:t>
             </a:fld>
             <a:endParaRPr kumimoji="1" lang="ja-JP" altLang="en-US"/>
           </a:p>
@@ -1572,7 +1572,7 @@
           <a:p>
             <a:fld id="{E9CC885B-4903-4D54-9A93-00025F12DED9}" type="datetimeFigureOut">
               <a:rPr kumimoji="1" lang="ja-JP" altLang="en-US" smtClean="0"/>
-              <a:t>2024/11/7</a:t>
+              <a:t>2025/1/6</a:t>
             </a:fld>
             <a:endParaRPr kumimoji="1" lang="ja-JP" altLang="en-US"/>
           </a:p>
@@ -2048,7 +2048,7 @@
           <a:p>
             <a:fld id="{E9CC885B-4903-4D54-9A93-00025F12DED9}" type="datetimeFigureOut">
               <a:rPr kumimoji="1" lang="ja-JP" altLang="en-US" smtClean="0"/>
-              <a:t>2024/11/7</a:t>
+              <a:t>2025/1/6</a:t>
             </a:fld>
             <a:endParaRPr kumimoji="1" lang="ja-JP" altLang="en-US"/>
           </a:p>
@@ -2189,7 +2189,7 @@
           <a:p>
             <a:fld id="{E9CC885B-4903-4D54-9A93-00025F12DED9}" type="datetimeFigureOut">
               <a:rPr kumimoji="1" lang="ja-JP" altLang="en-US" smtClean="0"/>
-              <a:t>2024/11/7</a:t>
+              <a:t>2025/1/6</a:t>
             </a:fld>
             <a:endParaRPr kumimoji="1" lang="ja-JP" altLang="en-US"/>
           </a:p>
@@ -2302,7 +2302,7 @@
           <a:p>
             <a:fld id="{E9CC885B-4903-4D54-9A93-00025F12DED9}" type="datetimeFigureOut">
               <a:rPr kumimoji="1" lang="ja-JP" altLang="en-US" smtClean="0"/>
-              <a:t>2024/11/7</a:t>
+              <a:t>2025/1/6</a:t>
             </a:fld>
             <a:endParaRPr kumimoji="1" lang="ja-JP" altLang="en-US"/>
           </a:p>
@@ -2645,7 +2645,7 @@
           <a:p>
             <a:fld id="{E9CC885B-4903-4D54-9A93-00025F12DED9}" type="datetimeFigureOut">
               <a:rPr kumimoji="1" lang="ja-JP" altLang="en-US" smtClean="0"/>
-              <a:t>2024/11/7</a:t>
+              <a:t>2025/1/6</a:t>
             </a:fld>
             <a:endParaRPr kumimoji="1" lang="ja-JP" altLang="en-US"/>
           </a:p>
@@ -2933,7 +2933,7 @@
           <a:p>
             <a:fld id="{E9CC885B-4903-4D54-9A93-00025F12DED9}" type="datetimeFigureOut">
               <a:rPr kumimoji="1" lang="ja-JP" altLang="en-US" smtClean="0"/>
-              <a:t>2024/11/7</a:t>
+              <a:t>2025/1/6</a:t>
             </a:fld>
             <a:endParaRPr kumimoji="1" lang="ja-JP" altLang="en-US"/>
           </a:p>
@@ -3206,7 +3206,7 @@
           <a:p>
             <a:fld id="{E9CC885B-4903-4D54-9A93-00025F12DED9}" type="datetimeFigureOut">
               <a:rPr kumimoji="1" lang="ja-JP" altLang="en-US" smtClean="0"/>
-              <a:t>2024/11/7</a:t>
+              <a:t>2025/1/6</a:t>
             </a:fld>
             <a:endParaRPr kumimoji="1" lang="ja-JP" altLang="en-US"/>
           </a:p>
@@ -6055,8 +6055,8 @@
           </a:p>
         </p:txBody>
       </p:sp>
-      <mc:AlternateContent xmlns:mc="http://schemas.openxmlformats.org/markup-compatibility/2006">
-        <mc:Choice xmlns:a14="http://schemas.microsoft.com/office/drawing/2010/main" Requires="a14">
+      <mc:AlternateContent xmlns:mc="http://schemas.openxmlformats.org/markup-compatibility/2006" xmlns:a14="http://schemas.microsoft.com/office/drawing/2010/main">
+        <mc:Choice Requires="a14">
           <p:sp>
             <p:nvSpPr>
               <p:cNvPr id="15" name="テキスト ボックス 14">
@@ -6216,11 +6216,9 @@
                 </a:endParaRPr>
               </a:p>
               <a:p>
-                <a:pPr/>
                 <a:endParaRPr kumimoji="1" lang="en-US" altLang="ja-JP" sz="2400" dirty="0"/>
               </a:p>
               <a:p>
-                <a:pPr/>
                 <a14:m>
                   <m:oMath xmlns:m="http://schemas.openxmlformats.org/officeDocument/2006/math">
                     <m:r>
@@ -6238,7 +6236,6 @@
                 <a:endParaRPr kumimoji="1" lang="en-US" altLang="ja-JP" sz="2400" dirty="0"/>
               </a:p>
               <a:p>
-                <a:pPr/>
                 <a14:m>
                   <m:oMath xmlns:m="http://schemas.openxmlformats.org/officeDocument/2006/math">
                     <m:r>
@@ -6256,7 +6253,6 @@
                 <a:endParaRPr kumimoji="1" lang="en-US" altLang="ja-JP" sz="2400" dirty="0"/>
               </a:p>
               <a:p>
-                <a:pPr/>
                 <a14:m>
                   <m:oMath xmlns:m="http://schemas.openxmlformats.org/officeDocument/2006/math">
                     <m:r>
@@ -6276,7 +6272,7 @@
             </p:txBody>
           </p:sp>
         </mc:Choice>
-        <mc:Fallback>
+        <mc:Fallback xmlns="">
           <p:sp>
             <p:nvSpPr>
               <p:cNvPr id="15" name="テキスト ボックス 14">
@@ -6401,7 +6397,7 @@
         <p:spPr>
           <a:xfrm>
             <a:off x="567542" y="1216429"/>
-            <a:ext cx="10221068" cy="461665"/>
+            <a:ext cx="10323660" cy="461665"/>
           </a:xfrm>
           <a:prstGeom prst="rect">
             <a:avLst/>
@@ -6419,7 +6415,11 @@
               <a:t>以上を踏まえて、</a:t>
             </a:r>
             <a:r>
-              <a:rPr kumimoji="1" lang="en-US" altLang="ja-JP" sz="2400" dirty="0"/>
+              <a:rPr kumimoji="1" lang="en-US" altLang="ja-JP" sz="2400" b="1" dirty="0">
+                <a:solidFill>
+                  <a:srgbClr val="FF0000"/>
+                </a:solidFill>
+              </a:rPr>
               <a:t>MyMath.cpp</a:t>
             </a:r>
             <a:r>
@@ -7080,8 +7080,8 @@
           </a:p>
         </p:txBody>
       </p:sp>
-      <mc:AlternateContent xmlns:mc="http://schemas.openxmlformats.org/markup-compatibility/2006">
-        <mc:Choice xmlns:a14="http://schemas.microsoft.com/office/drawing/2010/main" Requires="a14">
+      <mc:AlternateContent xmlns:mc="http://schemas.openxmlformats.org/markup-compatibility/2006" xmlns:a14="http://schemas.microsoft.com/office/drawing/2010/main">
+        <mc:Choice Requires="a14">
           <p:sp>
             <p:nvSpPr>
               <p:cNvPr id="15" name="テキスト ボックス 14">
@@ -7236,11 +7236,9 @@
                 </a:endParaRPr>
               </a:p>
               <a:p>
-                <a:pPr/>
                 <a:endParaRPr kumimoji="1" lang="en-US" altLang="ja-JP" sz="2400" dirty="0"/>
               </a:p>
               <a:p>
-                <a:pPr/>
                 <a14:m>
                   <m:oMath xmlns:m="http://schemas.openxmlformats.org/officeDocument/2006/math">
                     <m:r>
@@ -7258,7 +7256,6 @@
                 <a:endParaRPr kumimoji="1" lang="en-US" altLang="ja-JP" sz="2400" dirty="0"/>
               </a:p>
               <a:p>
-                <a:pPr/>
                 <a14:m>
                   <m:oMath xmlns:m="http://schemas.openxmlformats.org/officeDocument/2006/math">
                     <m:r>
@@ -7276,7 +7273,6 @@
                 <a:endParaRPr kumimoji="1" lang="en-US" altLang="ja-JP" sz="2400" dirty="0"/>
               </a:p>
               <a:p>
-                <a:pPr/>
                 <a14:m>
                   <m:oMath xmlns:m="http://schemas.openxmlformats.org/officeDocument/2006/math">
                     <m:r>
@@ -7296,7 +7292,7 @@
             </p:txBody>
           </p:sp>
         </mc:Choice>
-        <mc:Fallback>
+        <mc:Fallback xmlns="">
           <p:sp>
             <p:nvSpPr>
               <p:cNvPr id="15" name="テキスト ボックス 14">

--- a/ゲーム科1年/00_前期/ゲームプログラミングⅢ/ゲーム数学/実習/11_接線ベクトルと反射ベクトル.pptx
+++ b/ゲーム科1年/00_前期/ゲームプログラミングⅢ/ゲーム数学/実習/11_接線ベクトルと反射ベクトル.pptx
@@ -268,7 +268,7 @@
           <a:p>
             <a:fld id="{E9CC885B-4903-4D54-9A93-00025F12DED9}" type="datetimeFigureOut">
               <a:rPr kumimoji="1" lang="ja-JP" altLang="en-US" smtClean="0"/>
-              <a:t>2025/1/6</a:t>
+              <a:t>2026/2/20</a:t>
             </a:fld>
             <a:endParaRPr kumimoji="1" lang="ja-JP" altLang="en-US"/>
           </a:p>
@@ -498,7 +498,7 @@
           <a:p>
             <a:fld id="{E9CC885B-4903-4D54-9A93-00025F12DED9}" type="datetimeFigureOut">
               <a:rPr kumimoji="1" lang="ja-JP" altLang="en-US" smtClean="0"/>
-              <a:t>2025/1/6</a:t>
+              <a:t>2026/2/20</a:t>
             </a:fld>
             <a:endParaRPr kumimoji="1" lang="ja-JP" altLang="en-US"/>
           </a:p>
@@ -738,7 +738,7 @@
           <a:p>
             <a:fld id="{E9CC885B-4903-4D54-9A93-00025F12DED9}" type="datetimeFigureOut">
               <a:rPr kumimoji="1" lang="ja-JP" altLang="en-US" smtClean="0"/>
-              <a:t>2025/1/6</a:t>
+              <a:t>2026/2/20</a:t>
             </a:fld>
             <a:endParaRPr kumimoji="1" lang="ja-JP" altLang="en-US"/>
           </a:p>
@@ -968,7 +968,7 @@
           <a:p>
             <a:fld id="{E9CC885B-4903-4D54-9A93-00025F12DED9}" type="datetimeFigureOut">
               <a:rPr kumimoji="1" lang="ja-JP" altLang="en-US" smtClean="0"/>
-              <a:t>2025/1/6</a:t>
+              <a:t>2026/2/20</a:t>
             </a:fld>
             <a:endParaRPr kumimoji="1" lang="ja-JP" altLang="en-US"/>
           </a:p>
@@ -1243,7 +1243,7 @@
           <a:p>
             <a:fld id="{E9CC885B-4903-4D54-9A93-00025F12DED9}" type="datetimeFigureOut">
               <a:rPr kumimoji="1" lang="ja-JP" altLang="en-US" smtClean="0"/>
-              <a:t>2025/1/6</a:t>
+              <a:t>2026/2/20</a:t>
             </a:fld>
             <a:endParaRPr kumimoji="1" lang="ja-JP" altLang="en-US"/>
           </a:p>
@@ -1572,7 +1572,7 @@
           <a:p>
             <a:fld id="{E9CC885B-4903-4D54-9A93-00025F12DED9}" type="datetimeFigureOut">
               <a:rPr kumimoji="1" lang="ja-JP" altLang="en-US" smtClean="0"/>
-              <a:t>2025/1/6</a:t>
+              <a:t>2026/2/20</a:t>
             </a:fld>
             <a:endParaRPr kumimoji="1" lang="ja-JP" altLang="en-US"/>
           </a:p>
@@ -2048,7 +2048,7 @@
           <a:p>
             <a:fld id="{E9CC885B-4903-4D54-9A93-00025F12DED9}" type="datetimeFigureOut">
               <a:rPr kumimoji="1" lang="ja-JP" altLang="en-US" smtClean="0"/>
-              <a:t>2025/1/6</a:t>
+              <a:t>2026/2/20</a:t>
             </a:fld>
             <a:endParaRPr kumimoji="1" lang="ja-JP" altLang="en-US"/>
           </a:p>
@@ -2189,7 +2189,7 @@
           <a:p>
             <a:fld id="{E9CC885B-4903-4D54-9A93-00025F12DED9}" type="datetimeFigureOut">
               <a:rPr kumimoji="1" lang="ja-JP" altLang="en-US" smtClean="0"/>
-              <a:t>2025/1/6</a:t>
+              <a:t>2026/2/20</a:t>
             </a:fld>
             <a:endParaRPr kumimoji="1" lang="ja-JP" altLang="en-US"/>
           </a:p>
@@ -2302,7 +2302,7 @@
           <a:p>
             <a:fld id="{E9CC885B-4903-4D54-9A93-00025F12DED9}" type="datetimeFigureOut">
               <a:rPr kumimoji="1" lang="ja-JP" altLang="en-US" smtClean="0"/>
-              <a:t>2025/1/6</a:t>
+              <a:t>2026/2/20</a:t>
             </a:fld>
             <a:endParaRPr kumimoji="1" lang="ja-JP" altLang="en-US"/>
           </a:p>
@@ -2645,7 +2645,7 @@
           <a:p>
             <a:fld id="{E9CC885B-4903-4D54-9A93-00025F12DED9}" type="datetimeFigureOut">
               <a:rPr kumimoji="1" lang="ja-JP" altLang="en-US" smtClean="0"/>
-              <a:t>2025/1/6</a:t>
+              <a:t>2026/2/20</a:t>
             </a:fld>
             <a:endParaRPr kumimoji="1" lang="ja-JP" altLang="en-US"/>
           </a:p>
@@ -2933,7 +2933,7 @@
           <a:p>
             <a:fld id="{E9CC885B-4903-4D54-9A93-00025F12DED9}" type="datetimeFigureOut">
               <a:rPr kumimoji="1" lang="ja-JP" altLang="en-US" smtClean="0"/>
-              <a:t>2025/1/6</a:t>
+              <a:t>2026/2/20</a:t>
             </a:fld>
             <a:endParaRPr kumimoji="1" lang="ja-JP" altLang="en-US"/>
           </a:p>
@@ -3206,7 +3206,7 @@
           <a:p>
             <a:fld id="{E9CC885B-4903-4D54-9A93-00025F12DED9}" type="datetimeFigureOut">
               <a:rPr kumimoji="1" lang="ja-JP" altLang="en-US" smtClean="0"/>
-              <a:t>2025/1/6</a:t>
+              <a:t>2026/2/20</a:t>
             </a:fld>
             <a:endParaRPr kumimoji="1" lang="ja-JP" altLang="en-US"/>
           </a:p>
@@ -3998,7 +3998,7 @@
         <p:spPr>
           <a:xfrm>
             <a:off x="567542" y="1216429"/>
-            <a:ext cx="8087470" cy="830997"/>
+            <a:ext cx="7353295" cy="830997"/>
           </a:xfrm>
           <a:prstGeom prst="rect">
             <a:avLst/>
@@ -4017,7 +4017,7 @@
                   <a:srgbClr val="FF0000"/>
                 </a:solidFill>
               </a:rPr>
-              <a:t>StraightBullet.cpp</a:t>
+              <a:t>Reflact.cpp</a:t>
             </a:r>
             <a:r>
               <a:rPr lang="ja-JP" altLang="en-US" sz="2400" dirty="0"/>
@@ -4054,12 +4054,60 @@
           </a:p>
         </p:txBody>
       </p:sp>
+      <p:sp>
+        <p:nvSpPr>
+          <p:cNvPr id="7" name="テキスト ボックス 6">
+            <a:extLst>
+              <a:ext uri="{FF2B5EF4-FFF2-40B4-BE49-F238E27FC236}">
+                <a16:creationId xmlns:a16="http://schemas.microsoft.com/office/drawing/2014/main" id="{B399E61C-750E-433F-A218-130B62B50038}"/>
+              </a:ext>
+            </a:extLst>
+          </p:cNvPr>
+          <p:cNvSpPr txBox="1"/>
+          <p:nvPr/>
+        </p:nvSpPr>
+        <p:spPr>
+          <a:xfrm>
+            <a:off x="567542" y="5194251"/>
+            <a:ext cx="2646878" cy="461665"/>
+          </a:xfrm>
+          <a:prstGeom prst="rect">
+            <a:avLst/>
+          </a:prstGeom>
+          <a:noFill/>
+        </p:spPr>
+        <p:txBody>
+          <a:bodyPr wrap="none" rtlCol="0">
+            <a:spAutoFit/>
+          </a:bodyPr>
+          <a:lstStyle/>
+          <a:p>
+            <a:r>
+              <a:rPr kumimoji="1" lang="en-US" altLang="ja-JP" sz="2400" b="1" dirty="0">
+                <a:solidFill>
+                  <a:srgbClr val="FF0000"/>
+                </a:solidFill>
+              </a:rPr>
+              <a:t>※</a:t>
+            </a:r>
+            <a:r>
+              <a:rPr kumimoji="1" lang="ja-JP" altLang="en-US" sz="2400" b="1" dirty="0">
+                <a:solidFill>
+                  <a:srgbClr val="FF0000"/>
+                </a:solidFill>
+              </a:rPr>
+              <a:t>４か所あります</a:t>
+            </a:r>
+            <a:endParaRPr kumimoji="1" lang="en-US" altLang="ja-JP" sz="2400" dirty="0"/>
+          </a:p>
+        </p:txBody>
+      </p:sp>
       <p:pic>
         <p:nvPicPr>
-          <p:cNvPr id="5" name="図 4">
-            <a:extLst>
-              <a:ext uri="{FF2B5EF4-FFF2-40B4-BE49-F238E27FC236}">
-                <a16:creationId xmlns:a16="http://schemas.microsoft.com/office/drawing/2014/main" id="{83A3454D-16EE-4C96-9031-F0EFE7CCD380}"/>
+          <p:cNvPr id="3" name="図 2">
+            <a:extLst>
+              <a:ext uri="{FF2B5EF4-FFF2-40B4-BE49-F238E27FC236}">
+                <a16:creationId xmlns:a16="http://schemas.microsoft.com/office/drawing/2014/main" id="{3C196457-0A0D-426C-956E-2FDE8B284308}"/>
               </a:ext>
             </a:extLst>
           </p:cNvPr>
@@ -4076,66 +4124,14 @@
         </p:blipFill>
         <p:spPr>
           <a:xfrm>
-            <a:off x="567542" y="2187126"/>
-            <a:ext cx="10584452" cy="2205580"/>
+            <a:off x="567541" y="2187126"/>
+            <a:ext cx="8611802" cy="2867425"/>
           </a:xfrm>
           <a:prstGeom prst="rect">
             <a:avLst/>
           </a:prstGeom>
         </p:spPr>
       </p:pic>
-      <p:sp>
-        <p:nvSpPr>
-          <p:cNvPr id="9" name="正方形/長方形 8">
-            <a:extLst>
-              <a:ext uri="{FF2B5EF4-FFF2-40B4-BE49-F238E27FC236}">
-                <a16:creationId xmlns:a16="http://schemas.microsoft.com/office/drawing/2014/main" id="{326619F7-3EEB-4BAB-9DF4-EC5EEFE558F6}"/>
-              </a:ext>
-            </a:extLst>
-          </p:cNvPr>
-          <p:cNvSpPr/>
-          <p:nvPr/>
-        </p:nvSpPr>
-        <p:spPr>
-          <a:xfrm>
-            <a:off x="3980329" y="3429000"/>
-            <a:ext cx="1362636" cy="416859"/>
-          </a:xfrm>
-          <a:prstGeom prst="rect">
-            <a:avLst/>
-          </a:prstGeom>
-          <a:noFill/>
-          <a:ln w="38100">
-            <a:solidFill>
-              <a:srgbClr val="FF0000"/>
-            </a:solidFill>
-          </a:ln>
-        </p:spPr>
-        <p:style>
-          <a:lnRef idx="2">
-            <a:schemeClr val="accent1">
-              <a:shade val="50000"/>
-            </a:schemeClr>
-          </a:lnRef>
-          <a:fillRef idx="1">
-            <a:schemeClr val="accent1"/>
-          </a:fillRef>
-          <a:effectRef idx="0">
-            <a:schemeClr val="accent1"/>
-          </a:effectRef>
-          <a:fontRef idx="minor">
-            <a:schemeClr val="lt1"/>
-          </a:fontRef>
-        </p:style>
-        <p:txBody>
-          <a:bodyPr rtlCol="0" anchor="ctr"/>
-          <a:lstStyle/>
-          <a:p>
-            <a:pPr algn="ctr"/>
-            <a:endParaRPr kumimoji="1" lang="ja-JP" altLang="en-US"/>
-          </a:p>
-        </p:txBody>
-      </p:sp>
     </p:spTree>
     <p:extLst>
       <p:ext uri="{BB962C8B-B14F-4D97-AF65-F5344CB8AC3E}">
@@ -5258,7 +5254,7 @@
                   <a:srgbClr val="FF0000"/>
                 </a:solidFill>
               </a:rPr>
-              <a:t>横の投影</a:t>
+              <a:t>投影</a:t>
             </a:r>
             <a:r>
               <a:rPr kumimoji="1" lang="ja-JP" altLang="en-US" sz="2400" dirty="0"/>
